--- a/coastal-14-just-sold.pptx
+++ b/coastal-14-just-sold.pptx
@@ -3316,7 +3316,7 @@
         </p:nvSpPr>
         <p:spPr>
           <a:xfrm>
-            <a:off x="3913436" y="5460206"/>
+            <a:off x="3708499" y="5460206"/>
             <a:ext cx="666750" cy="7144"/>
           </a:xfrm>
           <a:prstGeom prst="rect">
@@ -3360,7 +3360,7 @@
         </p:nvSpPr>
         <p:spPr>
           <a:xfrm>
-            <a:off x="5706666" y="5460206"/>
+            <a:off x="5911751" y="5460206"/>
             <a:ext cx="666750" cy="7144"/>
           </a:xfrm>
           <a:prstGeom prst="rect">
@@ -3404,8 +3404,8 @@
         </p:nvSpPr>
         <p:spPr>
           <a:xfrm>
-            <a:off x="762000" y="15840075"/>
-            <a:ext cx="3207246" cy="9525"/>
+            <a:off x="762000" y="15621000"/>
+            <a:ext cx="4466183" cy="9525"/>
           </a:xfrm>
           <a:prstGeom prst="rect">
             <a:avLst/>
@@ -3449,7 +3449,7 @@
         <p:spPr>
           <a:xfrm>
             <a:off x="762000" y="16373475"/>
-            <a:ext cx="3207246" cy="9525"/>
+            <a:ext cx="4466183" cy="9525"/>
           </a:xfrm>
           <a:prstGeom prst="rect">
             <a:avLst/>
@@ -3492,8 +3492,8 @@
         </p:nvSpPr>
         <p:spPr>
           <a:xfrm>
-            <a:off x="762000" y="15840075"/>
-            <a:ext cx="9525" cy="542925"/>
+            <a:off x="762000" y="15621000"/>
+            <a:ext cx="9525" cy="762000"/>
           </a:xfrm>
           <a:prstGeom prst="rect">
             <a:avLst/>
@@ -3536,8 +3536,8 @@
         </p:nvSpPr>
         <p:spPr>
           <a:xfrm>
-            <a:off x="3959721" y="15840075"/>
-            <a:ext cx="9525" cy="542925"/>
+            <a:off x="5218658" y="15621000"/>
+            <a:ext cx="9525" cy="762000"/>
           </a:xfrm>
           <a:prstGeom prst="rect">
             <a:avLst/>
@@ -3580,7 +3580,7 @@
         </p:nvSpPr>
         <p:spPr>
           <a:xfrm>
-            <a:off x="1041493" y="16057656"/>
+            <a:off x="1079593" y="15948118"/>
             <a:ext cx="107763" cy="107763"/>
           </a:xfrm>
           <a:prstGeom prst="rect">
@@ -3663,8 +3663,8 @@
         </p:nvSpPr>
         <p:spPr>
           <a:xfrm>
-            <a:off x="7842647" y="938212"/>
-            <a:ext cx="3072765" cy="104775"/>
+            <a:off x="6894165" y="904875"/>
+            <a:ext cx="4590336" cy="171450"/>
           </a:xfrm>
           <a:prstGeom prst="rect">
             <a:avLst/>
@@ -3677,7 +3677,7 @@
           <a:p>
             <a:pPr algn="l"/>
             <a:r>
-              <a:rPr sz="750" i="0" b="1" spc="240">
+              <a:rPr sz="1200" i="0" b="1" spc="360">
                 <a:solidFill>
                   <a:srgbClr val="F3EEE7"/>
                 </a:solidFill>
@@ -3698,8 +3698,8 @@
         </p:nvSpPr>
         <p:spPr>
           <a:xfrm>
-            <a:off x="4326062" y="5392341"/>
-            <a:ext cx="1634728" cy="142875"/>
+            <a:off x="3998119" y="5349478"/>
+            <a:ext cx="2290762" cy="228600"/>
           </a:xfrm>
           <a:prstGeom prst="rect">
             <a:avLst/>
@@ -3712,7 +3712,7 @@
           <a:p>
             <a:pPr algn="ctr"/>
             <a:r>
-              <a:rPr sz="975" i="0" b="1" spc="351">
+              <a:rPr sz="1575" i="0" b="1" spc="472">
                 <a:solidFill>
                   <a:srgbClr val="A98BA6"/>
                 </a:solidFill>
@@ -3733,7 +3733,7 @@
         </p:nvSpPr>
         <p:spPr>
           <a:xfrm>
-            <a:off x="-2057400" y="5820966"/>
+            <a:off x="-2057400" y="5863828"/>
             <a:ext cx="14401800" cy="1862138"/>
           </a:xfrm>
           <a:prstGeom prst="rect">
@@ -3772,7 +3772,7 @@
         </p:nvSpPr>
         <p:spPr>
           <a:xfrm>
-            <a:off x="-2057400" y="7835503"/>
+            <a:off x="-2057400" y="7878366"/>
             <a:ext cx="14401800" cy="400050"/>
           </a:xfrm>
           <a:prstGeom prst="rect">
@@ -3807,8 +3807,8 @@
         </p:nvSpPr>
         <p:spPr>
           <a:xfrm>
-            <a:off x="-533400" y="8521303"/>
-            <a:ext cx="11353800" cy="258961"/>
+            <a:off x="-1295400" y="8621316"/>
+            <a:ext cx="12877800" cy="390525"/>
           </a:xfrm>
           <a:prstGeom prst="rect">
             <a:avLst/>
@@ -3825,7 +3825,7 @@
               </a:lnSpc>
             </a:pPr>
             <a:r>
-              <a:rPr sz="1275" i="0" b="0">
+              <a:rPr sz="1875" i="0" b="0">
                 <a:solidFill>
                   <a:srgbClr val="F3EEE7"/>
                 </a:solidFill>
@@ -3846,8 +3846,8 @@
         </p:nvSpPr>
         <p:spPr>
           <a:xfrm>
-            <a:off x="-2057400" y="9027914"/>
-            <a:ext cx="14401800" cy="114300"/>
+            <a:off x="-2057400" y="9316641"/>
+            <a:ext cx="14401800" cy="171450"/>
           </a:xfrm>
           <a:prstGeom prst="rect">
             <a:avLst/>
@@ -3860,7 +3860,7 @@
           <a:p>
             <a:pPr algn="ctr"/>
             <a:r>
-              <a:rPr sz="825" i="0" b="1" spc="247">
+              <a:rPr sz="1200" i="0" b="1" spc="312">
                 <a:solidFill>
                   <a:srgbClr val="F3EEE7"/>
                 </a:solidFill>
@@ -3881,8 +3881,8 @@
         </p:nvSpPr>
         <p:spPr>
           <a:xfrm>
-            <a:off x="1266825" y="16035338"/>
-            <a:ext cx="3820954" cy="152400"/>
+            <a:off x="1323975" y="15878175"/>
+            <a:ext cx="5652373" cy="247650"/>
           </a:xfrm>
           <a:prstGeom prst="rect">
             <a:avLst/>
@@ -3895,7 +3895,7 @@
           <a:p>
             <a:pPr algn="l"/>
             <a:r>
-              <a:rPr sz="1050" i="0" b="1" spc="231">
+              <a:rPr sz="1650" i="0" b="1" spc="330">
                 <a:solidFill>
                   <a:srgbClr val="F3EEE7"/>
                 </a:solidFill>
@@ -3916,7 +3916,7 @@
         </p:nvSpPr>
         <p:spPr>
           <a:xfrm>
-            <a:off x="3550146" y="16021050"/>
+            <a:off x="4770983" y="15911512"/>
             <a:ext cx="579120" cy="180975"/>
           </a:xfrm>
           <a:prstGeom prst="rect">
@@ -3951,8 +3951,8 @@
         </p:nvSpPr>
         <p:spPr>
           <a:xfrm>
-            <a:off x="-2057400" y="17306925"/>
-            <a:ext cx="14401800" cy="123825"/>
+            <a:off x="-2057400" y="17249775"/>
+            <a:ext cx="14401800" cy="180975"/>
           </a:xfrm>
           <a:prstGeom prst="rect">
             <a:avLst/>
@@ -3965,7 +3965,7 @@
           <a:p>
             <a:pPr algn="ctr"/>
             <a:r>
-              <a:rPr sz="825" i="0" b="1" spc="264">
+              <a:rPr sz="1200" i="0" b="1" spc="360">
                 <a:solidFill>
                   <a:srgbClr val="F3EEE7"/>
                 </a:solidFill>

--- a/coastal-14-just-sold.pptx
+++ b/coastal-14-just-sold.pptx
@@ -3316,7 +3316,7 @@
         </p:nvSpPr>
         <p:spPr>
           <a:xfrm>
-            <a:off x="3708499" y="5460206"/>
+            <a:off x="3692575" y="5460206"/>
             <a:ext cx="666750" cy="7144"/>
           </a:xfrm>
           <a:prstGeom prst="rect">
@@ -3360,7 +3360,7 @@
         </p:nvSpPr>
         <p:spPr>
           <a:xfrm>
-            <a:off x="5911751" y="5460206"/>
+            <a:off x="5927527" y="5460206"/>
             <a:ext cx="666750" cy="7144"/>
           </a:xfrm>
           <a:prstGeom prst="rect">
@@ -3404,8 +3404,8 @@
         </p:nvSpPr>
         <p:spPr>
           <a:xfrm>
-            <a:off x="762000" y="15621000"/>
-            <a:ext cx="4466183" cy="9525"/>
+            <a:off x="762000" y="15516225"/>
+            <a:ext cx="5283398" cy="9525"/>
           </a:xfrm>
           <a:prstGeom prst="rect">
             <a:avLst/>
@@ -3449,7 +3449,7 @@
         <p:spPr>
           <a:xfrm>
             <a:off x="762000" y="16373475"/>
-            <a:ext cx="4466183" cy="9525"/>
+            <a:ext cx="5283398" cy="9525"/>
           </a:xfrm>
           <a:prstGeom prst="rect">
             <a:avLst/>
@@ -3492,8 +3492,8 @@
         </p:nvSpPr>
         <p:spPr>
           <a:xfrm>
-            <a:off x="762000" y="15621000"/>
-            <a:ext cx="9525" cy="762000"/>
+            <a:off x="762000" y="15516225"/>
+            <a:ext cx="9525" cy="866775"/>
           </a:xfrm>
           <a:prstGeom prst="rect">
             <a:avLst/>
@@ -3536,8 +3536,8 @@
         </p:nvSpPr>
         <p:spPr>
           <a:xfrm>
-            <a:off x="5218658" y="15621000"/>
-            <a:ext cx="9525" cy="762000"/>
+            <a:off x="6035873" y="15516225"/>
+            <a:ext cx="9525" cy="866775"/>
           </a:xfrm>
           <a:prstGeom prst="rect">
             <a:avLst/>
@@ -3580,7 +3580,7 @@
         </p:nvSpPr>
         <p:spPr>
           <a:xfrm>
-            <a:off x="1079593" y="15948118"/>
+            <a:off x="1117693" y="15895731"/>
             <a:ext cx="107763" cy="107763"/>
           </a:xfrm>
           <a:prstGeom prst="rect">
@@ -3663,8 +3663,8 @@
         </p:nvSpPr>
         <p:spPr>
           <a:xfrm>
-            <a:off x="6894165" y="904875"/>
-            <a:ext cx="4590336" cy="171450"/>
+            <a:off x="6545610" y="885825"/>
+            <a:ext cx="5148024" cy="209550"/>
           </a:xfrm>
           <a:prstGeom prst="rect">
             <a:avLst/>
@@ -3677,7 +3677,7 @@
           <a:p>
             <a:pPr algn="l"/>
             <a:r>
-              <a:rPr sz="1200" i="0" b="1" spc="360">
+              <a:rPr sz="1425" i="0" b="1" spc="370">
                 <a:solidFill>
                   <a:srgbClr val="F3EEE7"/>
                 </a:solidFill>
@@ -3698,8 +3698,8 @@
         </p:nvSpPr>
         <p:spPr>
           <a:xfrm>
-            <a:off x="3998119" y="5349478"/>
-            <a:ext cx="2290762" cy="228600"/>
+            <a:off x="3972684" y="5339953"/>
+            <a:ext cx="2341483" cy="247650"/>
           </a:xfrm>
           <a:prstGeom prst="rect">
             <a:avLst/>
@@ -3712,7 +3712,7 @@
           <a:p>
             <a:pPr algn="ctr"/>
             <a:r>
-              <a:rPr sz="1575" i="0" b="1" spc="472">
+              <a:rPr sz="1650" i="0" b="1" spc="462">
                 <a:solidFill>
                   <a:srgbClr val="A98BA6"/>
                 </a:solidFill>
@@ -3733,7 +3733,7 @@
         </p:nvSpPr>
         <p:spPr>
           <a:xfrm>
-            <a:off x="-2057400" y="5863828"/>
+            <a:off x="-2057400" y="5873353"/>
             <a:ext cx="14401800" cy="1862138"/>
           </a:xfrm>
           <a:prstGeom prst="rect">
@@ -3772,7 +3772,7 @@
         </p:nvSpPr>
         <p:spPr>
           <a:xfrm>
-            <a:off x="-2057400" y="7878366"/>
+            <a:off x="-2057400" y="7887891"/>
             <a:ext cx="14401800" cy="400050"/>
           </a:xfrm>
           <a:prstGeom prst="rect">
@@ -3807,7 +3807,7 @@
         </p:nvSpPr>
         <p:spPr>
           <a:xfrm>
-            <a:off x="-1295400" y="8621316"/>
+            <a:off x="-1295400" y="8630841"/>
             <a:ext cx="12877800" cy="390525"/>
           </a:xfrm>
           <a:prstGeom prst="rect">
@@ -3846,8 +3846,8 @@
         </p:nvSpPr>
         <p:spPr>
           <a:xfrm>
-            <a:off x="-2057400" y="9316641"/>
-            <a:ext cx="14401800" cy="171450"/>
+            <a:off x="-2057400" y="9345216"/>
+            <a:ext cx="14401800" cy="209550"/>
           </a:xfrm>
           <a:prstGeom prst="rect">
             <a:avLst/>
@@ -3860,7 +3860,7 @@
           <a:p>
             <a:pPr algn="ctr"/>
             <a:r>
-              <a:rPr sz="1200" i="0" b="1" spc="312">
+              <a:rPr sz="1425" i="0" b="1" spc="313">
                 <a:solidFill>
                   <a:srgbClr val="F3EEE7"/>
                 </a:solidFill>
@@ -3881,8 +3881,8 @@
         </p:nvSpPr>
         <p:spPr>
           <a:xfrm>
-            <a:off x="1323975" y="15878175"/>
-            <a:ext cx="5652373" cy="247650"/>
+            <a:off x="1362075" y="15801975"/>
+            <a:ext cx="6685598" cy="295275"/>
           </a:xfrm>
           <a:prstGeom prst="rect">
             <a:avLst/>
@@ -3895,7 +3895,7 @@
           <a:p>
             <a:pPr algn="l"/>
             <a:r>
-              <a:rPr sz="1650" i="0" b="1" spc="330">
+              <a:rPr sz="2025" i="0" b="1" spc="364">
                 <a:solidFill>
                   <a:srgbClr val="F3EEE7"/>
                 </a:solidFill>
@@ -3916,8 +3916,8 @@
         </p:nvSpPr>
         <p:spPr>
           <a:xfrm>
-            <a:off x="4770983" y="15911512"/>
-            <a:ext cx="579120" cy="180975"/>
+            <a:off x="5454848" y="15792450"/>
+            <a:ext cx="731520" cy="314325"/>
           </a:xfrm>
           <a:prstGeom prst="rect">
             <a:avLst/>
@@ -3930,7 +3930,7 @@
           <a:p>
             <a:pPr algn="l"/>
             <a:r>
-              <a:rPr sz="1200" i="0" b="0">
+              <a:rPr sz="2100" i="0" b="0">
                 <a:solidFill>
                   <a:srgbClr val="A98BA6"/>
                 </a:solidFill>
@@ -3951,8 +3951,8 @@
         </p:nvSpPr>
         <p:spPr>
           <a:xfrm>
-            <a:off x="-2057400" y="17249775"/>
-            <a:ext cx="14401800" cy="180975"/>
+            <a:off x="-2057400" y="17211675"/>
+            <a:ext cx="14401800" cy="219075"/>
           </a:xfrm>
           <a:prstGeom prst="rect">
             <a:avLst/>
@@ -3965,7 +3965,7 @@
           <a:p>
             <a:pPr algn="ctr"/>
             <a:r>
-              <a:rPr sz="1200" i="0" b="1" spc="360">
+              <a:rPr sz="1425" i="0" b="1" spc="370">
                 <a:solidFill>
                   <a:srgbClr val="F3EEE7"/>
                 </a:solidFill>
